--- a/OUTPUT/DOC-09-Grand-Project-Presentation.pptx
+++ b/OUTPUT/DOC-09-Grand-Project-Presentation.pptx
@@ -4287,7 +4287,7 @@
                 </a:solidFill>
                 <a:latin typeface="Arial"/>
               </a:rPr>
-              <a:t>• Data Vulnerability: All records reside on a single local laptop with no cloud backup.</a:t>
+              <a:t>• Data Vulnerability: Records are kept in physical books and on a single local laptop with no cloud backup.</a:t>
             </a:r>
           </a:p>
         </p:txBody>
